--- a/src/Tests/Samples.VerifyPowerPointStream.verified.pptx
+++ b/src/Tests/Samples.VerifyPowerPointStream.verified.pptx
@@ -7504,6 +7504,47 @@
           </a:p>
         </p:txBody>
       </p:sp>
+      <p:sp>
+        <p:nvSpPr>
+          <p:cNvPr id="2055" name="SyncfusionLicense"/>
+          <p:cNvSpPr txBox="1">
+            <a:spLocks noChangeArrowheads="1"/>
+          </p:cNvSpPr>
+          <p:nvPr/>
+        </p:nvSpPr>
+        <p:spPr>
+          <a:xfrm rot="19980000">
+            <a:off x="2151062" y="3462338"/>
+            <a:ext cx="5778500" cy="635000"/>
+          </a:xfrm>
+          <a:prstGeom prst="rect">
+            <a:avLst/>
+          </a:prstGeom>
+          <a:ln>
+            <a:headEnd type="none"/>
+            <a:tailEnd type="none"/>
+          </a:ln>
+        </p:spPr>
+        <p:txBody>
+          <a:bodyPr anchor="ctr" wrap="square">
+            <a:spAutoFit/>
+          </a:bodyPr>
+          <a:lstStyle/>
+          <a:p>
+            <a:pPr algn="ctr" defTabSz="457200">
+              <a:defRPr sz="1800" dirty="0">
+                <a:solidFill>
+                  <a:srgbClr val="FF0000"/>
+                </a:solidFill>
+              </a:defRPr>
+            </a:pPr>
+            <a:r>
+              <a:rPr/>
+              <a:t>Created with a trial version of Syncfusion PowerPoint library</a:t>
+            </a:r>
+          </a:p>
+        </p:txBody>
+      </p:sp>
     </p:spTree>
   </p:cSld>
   <p:clrMap bg1="lt1" tx1="dk1" bg2="lt2" tx2="dk2" accent1="accent1" accent2="accent2" accent3="accent3" accent4="accent4" accent5="accent5" accent6="accent6" hlink="hlink" folHlink="folHlink"/>
@@ -8243,6 +8284,69 @@
           </a:p>
         </p:txBody>
       </p:sp>
+      <p:sp>
+        <p:nvSpPr>
+          <p:cNvPr id="4099" name="SyncfusionLicense"/>
+          <p:cNvSpPr txBox="1">
+            <a:spLocks noChangeArrowheads="1"/>
+          </p:cNvSpPr>
+          <p:nvPr/>
+        </p:nvSpPr>
+        <p:spPr>
+          <a:xfrm rot="0">
+            <a:off x="0" y="6416675"/>
+            <a:ext cx="10080625" cy="1143000"/>
+          </a:xfrm>
+          <a:prstGeom prst="rect">
+            <a:avLst/>
+          </a:prstGeom>
+          <a:solidFill>
+            <a:srgbClr val="FFFFFF"/>
+          </a:solidFill>
+          <a:ln>
+            <a:headEnd type="none"/>
+            <a:tailEnd type="none"/>
+          </a:ln>
+        </p:spPr>
+        <p:txBody>
+          <a:bodyPr anchor="ctr" wrap="square">
+            <a:spAutoFit/>
+          </a:bodyPr>
+          <a:lstStyle/>
+          <a:p>
+            <a:pPr algn="ctr" defTabSz="457200">
+              <a:defRPr sz="1800" dirty="0">
+                <a:solidFill>
+                  <a:srgbClr val="FF0000"/>
+                </a:solidFill>
+              </a:defRPr>
+            </a:pPr>
+            <a:r>
+              <a:rPr/>
+              <a:t>Created with a trial version of Syncfusion PowerPoint library or registered the wrong key in your application. Click </a:t>
+            </a:r>
+            <a:r>
+              <a:rPr dirty="0">
+                <a:solidFill>
+                  <a:srgbClr val="0000FF"/>
+                </a:solidFill>
+                <a:hlinkClick r:id="DeterministicId1" action="ppaction://hlinkfile">
+                  <a:extLst>
+                    <a:ext uri="{A12FA001-AC4F-418D-AE19-62706E023703}">
+                      <ahyp:hlinkClr xmlns:ahyp="http://schemas.microsoft.com/office/drawing/2018/hyperlinkcolor" val="tx"/>
+                    </a:ext>
+                  </a:extLst>
+                </a:hlinkClick>
+              </a:rPr>
+              <a:t>here</a:t>
+            </a:r>
+            <a:r>
+              <a:rPr/>
+              <a:t> to obtain the valid key.</a:t>
+            </a:r>
+          </a:p>
+        </p:txBody>
+      </p:sp>
     </p:spTree>
   </p:cSld>
   <p:clrMapOvr>
@@ -31360,6 +31464,69 @@
           </a:graphicData>
         </a:graphic>
       </p:graphicFrame>
+      <p:sp>
+        <p:nvSpPr>
+          <p:cNvPr id="6147" name="SyncfusionLicense"/>
+          <p:cNvSpPr txBox="1">
+            <a:spLocks noChangeArrowheads="1"/>
+          </p:cNvSpPr>
+          <p:nvPr/>
+        </p:nvSpPr>
+        <p:spPr>
+          <a:xfrm rot="0">
+            <a:off x="0" y="6416675"/>
+            <a:ext cx="10080625" cy="1143000"/>
+          </a:xfrm>
+          <a:prstGeom prst="rect">
+            <a:avLst/>
+          </a:prstGeom>
+          <a:solidFill>
+            <a:srgbClr val="FFFFFF"/>
+          </a:solidFill>
+          <a:ln>
+            <a:headEnd type="none"/>
+            <a:tailEnd type="none"/>
+          </a:ln>
+        </p:spPr>
+        <p:txBody>
+          <a:bodyPr anchor="ctr" wrap="square">
+            <a:spAutoFit/>
+          </a:bodyPr>
+          <a:lstStyle/>
+          <a:p>
+            <a:pPr algn="ctr" defTabSz="457200">
+              <a:defRPr sz="1800" dirty="0">
+                <a:solidFill>
+                  <a:srgbClr val="FF0000"/>
+                </a:solidFill>
+              </a:defRPr>
+            </a:pPr>
+            <a:r>
+              <a:rPr/>
+              <a:t>Created with a trial version of Syncfusion PowerPoint library or registered the wrong key in your application. Click </a:t>
+            </a:r>
+            <a:r>
+              <a:rPr dirty="0">
+                <a:solidFill>
+                  <a:srgbClr val="0000FF"/>
+                </a:solidFill>
+                <a:hlinkClick r:id="DeterministicId1" action="ppaction://hlinkfile">
+                  <a:extLst>
+                    <a:ext uri="{A12FA001-AC4F-418D-AE19-62706E023703}">
+                      <ahyp:hlinkClr xmlns:ahyp="http://schemas.microsoft.com/office/drawing/2018/hyperlinkcolor" val="tx"/>
+                    </a:ext>
+                  </a:extLst>
+                </a:hlinkClick>
+              </a:rPr>
+              <a:t>here</a:t>
+            </a:r>
+            <a:r>
+              <a:rPr/>
+              <a:t> to obtain the valid key.</a:t>
+            </a:r>
+          </a:p>
+        </p:txBody>
+      </p:sp>
     </p:spTree>
   </p:cSld>
   <p:clrMapOvr>
